--- a/web/static/files/ICASW-slide-template.pptx
+++ b/web/static/files/ICASW-slide-template.pptx
@@ -3854,7 +3854,7 @@
                 </a:solidFill>
                 <a:latin typeface="Arial"/>
               </a:rPr>
-              <a:t>Paper with workshop · Paper without workshop</a:t>
+              <a:t>Tutorial · Regular paper</a:t>
             </a:r>
           </a:p>
         </p:txBody>
